--- a/AI_Agents_and_Advanced_Fine_Tuning_Bootcamp/Slides/Week_09_agent_communications.pptx
+++ b/AI_Agents_and_Advanced_Fine_Tuning_Bootcamp/Slides/Week_09_agent_communications.pptx
@@ -3326,7 +3326,7 @@
                 </a:solidFill>
                 <a:latin typeface="Calibri"/>
               </a:rPr>
-              <a:t>Sunday, August 2, 2026</a:t>
+              <a:t>Sunday, November 29, 2026</a:t>
             </a:r>
           </a:p>
         </p:txBody>
@@ -4731,7 +4731,7 @@
                 </a:solidFill>
                 <a:latin typeface="Calibri"/>
               </a:rPr>
-              <a:t>3. Discovery: Nanda and Cisco Agency</a:t>
+              <a:t>3. Discovery: Nanda and Cisco's AGNTCY initiative</a:t>
             </a:r>
           </a:p>
         </p:txBody>
@@ -4770,7 +4770,7 @@
                 </a:solidFill>
                 <a:latin typeface="Calibri"/>
               </a:rPr>
-              <a:t>  •  Nanda proposes a federated registry: anyone can publish, anyone can query. Cisco Agency proposes a directory model with identity guarantees: agents have signed identities verifiable by a central authority. Both compete for the role DNS plays for hostnames. No winner yet; expect a hybrid.</a:t>
+              <a:t>  •  Nanda proposes a federated registry: anyone can publish, anyone can query. Cisco's AGNTCY initiative proposes a directory model with identity guarantees: agents have signed identities verifiable by a central authority. Both compete for the role DNS plays for hostnames. No winner yet; expect a hybrid.</a:t>
             </a:r>
           </a:p>
         </p:txBody>
@@ -7315,7 +7315,7 @@
                 </a:solidFill>
                 <a:latin typeface="Calibri"/>
               </a:rPr>
-              <a:t>  •  Agent-to-agent communication is becoming a protocol problem, not a framework problem. Cover A2A, Agent Cards, discovery via Nanda and Cisco Agency, and the security boundary. Then cover cooperation protocols: role-based, voting-based, and debate-based.</a:t>
+              <a:t>  •  Agent-to-agent communication is becoming a protocol problem, not a framework problem. Cover A2A, Agent Cards, discovery via Nanda and Cisco's AGNTCY initiative, and the security boundary. Then cover cooperation protocols: role-based, voting-based, and debate-based.</a:t>
             </a:r>
           </a:p>
         </p:txBody>
@@ -8405,7 +8405,7 @@
                 </a:solidFill>
                 <a:latin typeface="Calibri"/>
               </a:rPr>
-              <a:t>  •  Nanda is a federated registry. Cisco Agency proposes a directory model with identity guarantees. Both compete for the role DNS plays for hostnames.</a:t>
+              <a:t>  •  Nanda is a federated registry. Cisco's AGNTCY initiative proposes a directory model with identity guarantees. Both compete for the role DNS plays for hostnames.</a:t>
             </a:r>
           </a:p>
         </p:txBody>
